--- a/DataStruct/포인터와함수와변수.pptx
+++ b/DataStruct/포인터와함수와변수.pptx
@@ -272,7 +272,7 @@
           <a:p>
             <a:fld id="{A91AC65E-A80B-4811-8D2F-1C8F6752DFE8}" type="datetimeFigureOut">
               <a:rPr lang="ko-KR" altLang="en-US" smtClean="0"/>
-              <a:t>2026-07-19</a:t>
+              <a:t>2026-07-20</a:t>
             </a:fld>
             <a:endParaRPr lang="ko-KR" altLang="en-US"/>
           </a:p>
@@ -470,7 +470,7 @@
           <a:p>
             <a:fld id="{A91AC65E-A80B-4811-8D2F-1C8F6752DFE8}" type="datetimeFigureOut">
               <a:rPr lang="ko-KR" altLang="en-US" smtClean="0"/>
-              <a:t>2026-07-19</a:t>
+              <a:t>2026-07-20</a:t>
             </a:fld>
             <a:endParaRPr lang="ko-KR" altLang="en-US"/>
           </a:p>
@@ -678,7 +678,7 @@
           <a:p>
             <a:fld id="{A91AC65E-A80B-4811-8D2F-1C8F6752DFE8}" type="datetimeFigureOut">
               <a:rPr lang="ko-KR" altLang="en-US" smtClean="0"/>
-              <a:t>2026-07-19</a:t>
+              <a:t>2026-07-20</a:t>
             </a:fld>
             <a:endParaRPr lang="ko-KR" altLang="en-US"/>
           </a:p>
@@ -876,7 +876,7 @@
           <a:p>
             <a:fld id="{A91AC65E-A80B-4811-8D2F-1C8F6752DFE8}" type="datetimeFigureOut">
               <a:rPr lang="ko-KR" altLang="en-US" smtClean="0"/>
-              <a:t>2026-07-19</a:t>
+              <a:t>2026-07-20</a:t>
             </a:fld>
             <a:endParaRPr lang="ko-KR" altLang="en-US"/>
           </a:p>
@@ -1151,7 +1151,7 @@
           <a:p>
             <a:fld id="{A91AC65E-A80B-4811-8D2F-1C8F6752DFE8}" type="datetimeFigureOut">
               <a:rPr lang="ko-KR" altLang="en-US" smtClean="0"/>
-              <a:t>2026-07-19</a:t>
+              <a:t>2026-07-20</a:t>
             </a:fld>
             <a:endParaRPr lang="ko-KR" altLang="en-US"/>
           </a:p>
@@ -1416,7 +1416,7 @@
           <a:p>
             <a:fld id="{A91AC65E-A80B-4811-8D2F-1C8F6752DFE8}" type="datetimeFigureOut">
               <a:rPr lang="ko-KR" altLang="en-US" smtClean="0"/>
-              <a:t>2026-07-19</a:t>
+              <a:t>2026-07-20</a:t>
             </a:fld>
             <a:endParaRPr lang="ko-KR" altLang="en-US"/>
           </a:p>
@@ -1828,7 +1828,7 @@
           <a:p>
             <a:fld id="{A91AC65E-A80B-4811-8D2F-1C8F6752DFE8}" type="datetimeFigureOut">
               <a:rPr lang="ko-KR" altLang="en-US" smtClean="0"/>
-              <a:t>2026-07-19</a:t>
+              <a:t>2026-07-20</a:t>
             </a:fld>
             <a:endParaRPr lang="ko-KR" altLang="en-US"/>
           </a:p>
@@ -1969,7 +1969,7 @@
           <a:p>
             <a:fld id="{A91AC65E-A80B-4811-8D2F-1C8F6752DFE8}" type="datetimeFigureOut">
               <a:rPr lang="ko-KR" altLang="en-US" smtClean="0"/>
-              <a:t>2026-07-19</a:t>
+              <a:t>2026-07-20</a:t>
             </a:fld>
             <a:endParaRPr lang="ko-KR" altLang="en-US"/>
           </a:p>
@@ -2082,7 +2082,7 @@
           <a:p>
             <a:fld id="{A91AC65E-A80B-4811-8D2F-1C8F6752DFE8}" type="datetimeFigureOut">
               <a:rPr lang="ko-KR" altLang="en-US" smtClean="0"/>
-              <a:t>2026-07-19</a:t>
+              <a:t>2026-07-20</a:t>
             </a:fld>
             <a:endParaRPr lang="ko-KR" altLang="en-US"/>
           </a:p>
@@ -2393,7 +2393,7 @@
           <a:p>
             <a:fld id="{A91AC65E-A80B-4811-8D2F-1C8F6752DFE8}" type="datetimeFigureOut">
               <a:rPr lang="ko-KR" altLang="en-US" smtClean="0"/>
-              <a:t>2026-07-19</a:t>
+              <a:t>2026-07-20</a:t>
             </a:fld>
             <a:endParaRPr lang="ko-KR" altLang="en-US"/>
           </a:p>
@@ -2681,7 +2681,7 @@
           <a:p>
             <a:fld id="{A91AC65E-A80B-4811-8D2F-1C8F6752DFE8}" type="datetimeFigureOut">
               <a:rPr lang="ko-KR" altLang="en-US" smtClean="0"/>
-              <a:t>2026-07-19</a:t>
+              <a:t>2026-07-20</a:t>
             </a:fld>
             <a:endParaRPr lang="ko-KR" altLang="en-US"/>
           </a:p>
@@ -2922,7 +2922,7 @@
           <a:p>
             <a:fld id="{A91AC65E-A80B-4811-8D2F-1C8F6752DFE8}" type="datetimeFigureOut">
               <a:rPr lang="ko-KR" altLang="en-US" smtClean="0"/>
-              <a:t>2026-07-19</a:t>
+              <a:t>2026-07-20</a:t>
             </a:fld>
             <a:endParaRPr lang="ko-KR" altLang="en-US"/>
           </a:p>
@@ -10603,6 +10603,174 @@
           </a:fontRef>
         </p:style>
       </p:cxnSp>
+      <p:cxnSp>
+        <p:nvCxnSpPr>
+          <p:cNvPr id="2" name="직선 화살표 연결선 1">
+            <a:extLst>
+              <a:ext uri="{FF2B5EF4-FFF2-40B4-BE49-F238E27FC236}">
+                <a16:creationId xmlns:a16="http://schemas.microsoft.com/office/drawing/2014/main" id="{A68177F9-C3AA-06C1-EA70-D111B21BDF1B}"/>
+              </a:ext>
+            </a:extLst>
+          </p:cNvPr>
+          <p:cNvCxnSpPr>
+            <a:cxnSpLocks/>
+          </p:cNvCxnSpPr>
+          <p:nvPr/>
+        </p:nvCxnSpPr>
+        <p:spPr>
+          <a:xfrm>
+            <a:off x="4050890" y="774700"/>
+            <a:ext cx="1504336" cy="0"/>
+          </a:xfrm>
+          <a:prstGeom prst="straightConnector1">
+            <a:avLst/>
+          </a:prstGeom>
+          <a:ln w="38100" cap="flat" cmpd="sng" algn="ctr">
+            <a:solidFill>
+              <a:schemeClr val="accent1">
+                <a:lumMod val="50000"/>
+              </a:schemeClr>
+            </a:solidFill>
+            <a:prstDash val="sysDash"/>
+            <a:round/>
+            <a:headEnd type="none" w="med" len="med"/>
+            <a:tailEnd type="arrow" w="med" len="med"/>
+          </a:ln>
+        </p:spPr>
+        <p:style>
+          <a:lnRef idx="0">
+            <a:scrgbClr r="0" g="0" b="0"/>
+          </a:lnRef>
+          <a:fillRef idx="0">
+            <a:scrgbClr r="0" g="0" b="0"/>
+          </a:fillRef>
+          <a:effectRef idx="0">
+            <a:scrgbClr r="0" g="0" b="0"/>
+          </a:effectRef>
+          <a:fontRef idx="minor">
+            <a:schemeClr val="tx1"/>
+          </a:fontRef>
+        </p:style>
+      </p:cxnSp>
+      <p:cxnSp>
+        <p:nvCxnSpPr>
+          <p:cNvPr id="10" name="직선 화살표 연결선 9">
+            <a:extLst>
+              <a:ext uri="{FF2B5EF4-FFF2-40B4-BE49-F238E27FC236}">
+                <a16:creationId xmlns:a16="http://schemas.microsoft.com/office/drawing/2014/main" id="{FAC64B02-108C-3B85-74F3-B21FB03DC687}"/>
+              </a:ext>
+            </a:extLst>
+          </p:cNvPr>
+          <p:cNvCxnSpPr>
+            <a:cxnSpLocks/>
+          </p:cNvCxnSpPr>
+          <p:nvPr/>
+        </p:nvCxnSpPr>
+        <p:spPr>
+          <a:xfrm>
+            <a:off x="6803923" y="774700"/>
+            <a:ext cx="1848464" cy="0"/>
+          </a:xfrm>
+          <a:prstGeom prst="straightConnector1">
+            <a:avLst/>
+          </a:prstGeom>
+          <a:ln w="38100" cap="flat" cmpd="sng" algn="ctr">
+            <a:solidFill>
+              <a:schemeClr val="accent1">
+                <a:lumMod val="50000"/>
+              </a:schemeClr>
+            </a:solidFill>
+            <a:prstDash val="solid"/>
+            <a:round/>
+            <a:headEnd type="none" w="med" len="med"/>
+            <a:tailEnd type="arrow" w="med" len="med"/>
+          </a:ln>
+        </p:spPr>
+        <p:style>
+          <a:lnRef idx="0">
+            <a:scrgbClr r="0" g="0" b="0"/>
+          </a:lnRef>
+          <a:fillRef idx="0">
+            <a:scrgbClr r="0" g="0" b="0"/>
+          </a:fillRef>
+          <a:effectRef idx="0">
+            <a:scrgbClr r="0" g="0" b="0"/>
+          </a:effectRef>
+          <a:fontRef idx="minor">
+            <a:schemeClr val="tx1"/>
+          </a:fontRef>
+        </p:style>
+      </p:cxnSp>
+      <p:sp>
+        <p:nvSpPr>
+          <p:cNvPr id="15" name="TextBox 14">
+            <a:extLst>
+              <a:ext uri="{FF2B5EF4-FFF2-40B4-BE49-F238E27FC236}">
+                <a16:creationId xmlns:a16="http://schemas.microsoft.com/office/drawing/2014/main" id="{47E8B5D8-9A4F-25D6-B6B7-8C53E6614181}"/>
+              </a:ext>
+            </a:extLst>
+          </p:cNvPr>
+          <p:cNvSpPr txBox="1"/>
+          <p:nvPr/>
+        </p:nvSpPr>
+        <p:spPr>
+          <a:xfrm>
+            <a:off x="3952158" y="360515"/>
+            <a:ext cx="1104900" cy="369332"/>
+          </a:xfrm>
+          <a:prstGeom prst="rect">
+            <a:avLst/>
+          </a:prstGeom>
+          <a:noFill/>
+        </p:spPr>
+        <p:txBody>
+          <a:bodyPr wrap="square" rtlCol="0">
+            <a:spAutoFit/>
+          </a:bodyPr>
+          <a:lstStyle/>
+          <a:p>
+            <a:r>
+              <a:rPr lang="ko-KR" altLang="en-US"/>
+              <a:t>복사선</a:t>
+            </a:r>
+          </a:p>
+        </p:txBody>
+      </p:sp>
+      <p:sp>
+        <p:nvSpPr>
+          <p:cNvPr id="19" name="TextBox 18">
+            <a:extLst>
+              <a:ext uri="{FF2B5EF4-FFF2-40B4-BE49-F238E27FC236}">
+                <a16:creationId xmlns:a16="http://schemas.microsoft.com/office/drawing/2014/main" id="{E1EB7A34-4446-65F1-FBC9-72DD86295EE7}"/>
+              </a:ext>
+            </a:extLst>
+          </p:cNvPr>
+          <p:cNvSpPr txBox="1"/>
+          <p:nvPr/>
+        </p:nvSpPr>
+        <p:spPr>
+          <a:xfrm>
+            <a:off x="6803923" y="304284"/>
+            <a:ext cx="1104900" cy="369332"/>
+          </a:xfrm>
+          <a:prstGeom prst="rect">
+            <a:avLst/>
+          </a:prstGeom>
+          <a:noFill/>
+        </p:spPr>
+        <p:txBody>
+          <a:bodyPr wrap="square" rtlCol="0">
+            <a:spAutoFit/>
+          </a:bodyPr>
+          <a:lstStyle/>
+          <a:p>
+            <a:r>
+              <a:rPr lang="ko-KR" altLang="en-US"/>
+              <a:t>참조선</a:t>
+            </a:r>
+          </a:p>
+        </p:txBody>
+      </p:sp>
     </p:spTree>
     <p:extLst>
       <p:ext uri="{BB962C8B-B14F-4D97-AF65-F5344CB8AC3E}">
